--- a/Slides/Basketball 6/Basketball_6_Lecture.pptx
+++ b/Slides/Basketball 6/Basketball_6_Lecture.pptx
@@ -217,7 +217,7 @@
           <a:p>
             <a:fld id="{C04E5E84-956F-4423-97B3-5936A6D8EEEE}" type="datetimeFigureOut">
               <a:rPr lang="en-US" smtClean="0"/>
-              <a:t>3/24/2023</a:t>
+              <a:t>4/1/2026</a:t>
             </a:fld>
             <a:endParaRPr lang="en-US"/>
           </a:p>
@@ -660,6 +660,13 @@
             <a:schemeClr val="lt1"/>
           </a:fontRef>
         </p:style>
+        <p:txBody>
+          <a:bodyPr/>
+          <a:lstStyle/>
+          <a:p>
+            <a:endParaRPr lang="en-US"/>
+          </a:p>
+        </p:txBody>
       </p:sp>
       <p:sp>
         <p:nvSpPr>
@@ -678,7 +685,7 @@
           <a:p>
             <a:fld id="{3881C039-66A3-4640-815B-3B5A8B7D868D}" type="datetimeFigureOut">
               <a:rPr lang="en-US" smtClean="0"/>
-              <a:t>3/24/2023</a:t>
+              <a:t>4/1/2026</a:t>
             </a:fld>
             <a:endParaRPr lang="en-US"/>
           </a:p>
@@ -848,7 +855,7 @@
           <a:p>
             <a:fld id="{3881C039-66A3-4640-815B-3B5A8B7D868D}" type="datetimeFigureOut">
               <a:rPr lang="en-US" smtClean="0"/>
-              <a:t>3/24/2023</a:t>
+              <a:t>4/1/2026</a:t>
             </a:fld>
             <a:endParaRPr lang="en-US"/>
           </a:p>
@@ -1069,7 +1076,7 @@
           <a:p>
             <a:fld id="{3881C039-66A3-4640-815B-3B5A8B7D868D}" type="datetimeFigureOut">
               <a:rPr lang="en-US" smtClean="0"/>
-              <a:t>3/24/2023</a:t>
+              <a:t>4/1/2026</a:t>
             </a:fld>
             <a:endParaRPr lang="en-US"/>
           </a:p>
@@ -1280,7 +1287,7 @@
           <a:p>
             <a:fld id="{3881C039-66A3-4640-815B-3B5A8B7D868D}" type="datetimeFigureOut">
               <a:rPr lang="en-US" smtClean="0"/>
-              <a:t>3/24/2023</a:t>
+              <a:t>4/1/2026</a:t>
             </a:fld>
             <a:endParaRPr lang="en-US"/>
           </a:p>
@@ -1575,7 +1582,7 @@
           <a:p>
             <a:fld id="{3881C039-66A3-4640-815B-3B5A8B7D868D}" type="datetimeFigureOut">
               <a:rPr lang="en-US" smtClean="0"/>
-              <a:t>3/24/2023</a:t>
+              <a:t>4/1/2026</a:t>
             </a:fld>
             <a:endParaRPr lang="en-US"/>
           </a:p>
@@ -1904,7 +1911,7 @@
           <a:p>
             <a:fld id="{3881C039-66A3-4640-815B-3B5A8B7D868D}" type="datetimeFigureOut">
               <a:rPr lang="en-US" smtClean="0"/>
-              <a:t>3/24/2023</a:t>
+              <a:t>4/1/2026</a:t>
             </a:fld>
             <a:endParaRPr lang="en-US"/>
           </a:p>
@@ -2396,7 +2403,7 @@
           <a:p>
             <a:fld id="{3881C039-66A3-4640-815B-3B5A8B7D868D}" type="datetimeFigureOut">
               <a:rPr lang="en-US" smtClean="0"/>
-              <a:t>3/24/2023</a:t>
+              <a:t>4/1/2026</a:t>
             </a:fld>
             <a:endParaRPr lang="en-US"/>
           </a:p>
@@ -2555,7 +2562,7 @@
           <a:p>
             <a:fld id="{3881C039-66A3-4640-815B-3B5A8B7D868D}" type="datetimeFigureOut">
               <a:rPr lang="en-US" smtClean="0"/>
-              <a:t>3/24/2023</a:t>
+              <a:t>4/1/2026</a:t>
             </a:fld>
             <a:endParaRPr lang="en-US"/>
           </a:p>
@@ -2691,7 +2698,7 @@
           <a:p>
             <a:fld id="{3881C039-66A3-4640-815B-3B5A8B7D868D}" type="datetimeFigureOut">
               <a:rPr lang="en-US" smtClean="0"/>
-              <a:t>3/24/2023</a:t>
+              <a:t>4/1/2026</a:t>
             </a:fld>
             <a:endParaRPr lang="en-US"/>
           </a:p>
@@ -3019,7 +3026,7 @@
           <a:p>
             <a:fld id="{3881C039-66A3-4640-815B-3B5A8B7D868D}" type="datetimeFigureOut">
               <a:rPr lang="en-US" smtClean="0"/>
-              <a:t>3/24/2023</a:t>
+              <a:t>4/1/2026</a:t>
             </a:fld>
             <a:endParaRPr lang="en-US"/>
           </a:p>
@@ -3334,7 +3341,7 @@
           <a:p>
             <a:fld id="{3881C039-66A3-4640-815B-3B5A8B7D868D}" type="datetimeFigureOut">
               <a:rPr lang="en-US" smtClean="0"/>
-              <a:t>3/24/2023</a:t>
+              <a:t>4/1/2026</a:t>
             </a:fld>
             <a:endParaRPr lang="en-US"/>
           </a:p>
@@ -3454,6 +3461,13 @@
             <a:schemeClr val="lt1"/>
           </a:fontRef>
         </p:style>
+        <p:txBody>
+          <a:bodyPr/>
+          <a:lstStyle/>
+          <a:p>
+            <a:endParaRPr lang="en-US"/>
+          </a:p>
+        </p:txBody>
       </p:sp>
       <p:sp>
         <p:nvSpPr>
@@ -3586,7 +3600,7 @@
           <a:p>
             <a:fld id="{3881C039-66A3-4640-815B-3B5A8B7D868D}" type="datetimeFigureOut">
               <a:rPr lang="en-US" smtClean="0"/>
-              <a:t>3/24/2023</a:t>
+              <a:t>4/1/2026</a:t>
             </a:fld>
             <a:endParaRPr lang="en-US"/>
           </a:p>
@@ -4266,13 +4280,13 @@
           <p:nvPr/>
         </p:nvPicPr>
         <p:blipFill>
-          <a:blip r:embed="rId4">
+          <a:blip>
             <a:extLst>
               <a:ext uri="{28A0092B-C50C-407E-A947-70E740481C1C}">
                 <a14:useLocalDpi xmlns:a14="http://schemas.microsoft.com/office/drawing/2010/main" val="0"/>
               </a:ext>
               <a:ext uri="{96DAC541-7B7A-43D3-8B79-37D633B846F1}">
-                <asvg:svgBlip xmlns:asvg="http://schemas.microsoft.com/office/drawing/2016/SVG/main" r:embed="rId5"/>
+                <asvg:svgBlip xmlns:asvg="http://schemas.microsoft.com/office/drawing/2016/SVG/main" r:embed="rId4"/>
               </a:ext>
             </a:extLst>
           </a:blip>
@@ -4348,7 +4362,7 @@
           <p:nvPr/>
         </p:nvPicPr>
         <p:blipFill rotWithShape="1">
-          <a:blip r:embed="rId6">
+          <a:blip r:embed="rId5">
             <a:extLst>
               <a:ext uri="{28A0092B-C50C-407E-A947-70E740481C1C}">
                 <a14:useLocalDpi xmlns:a14="http://schemas.microsoft.com/office/drawing/2010/main" val="0"/>
@@ -4421,13 +4435,13 @@
           <p:nvPr/>
         </p:nvPicPr>
         <p:blipFill>
-          <a:blip r:embed="rId2">
+          <a:blip>
             <a:extLst>
               <a:ext uri="{28A0092B-C50C-407E-A947-70E740481C1C}">
                 <a14:useLocalDpi xmlns:a14="http://schemas.microsoft.com/office/drawing/2010/main" val="0"/>
               </a:ext>
               <a:ext uri="{96DAC541-7B7A-43D3-8B79-37D633B846F1}">
-                <asvg:svgBlip xmlns:asvg="http://schemas.microsoft.com/office/drawing/2016/SVG/main" r:embed="rId3"/>
+                <asvg:svgBlip xmlns:asvg="http://schemas.microsoft.com/office/drawing/2016/SVG/main" r:embed="rId2"/>
               </a:ext>
             </a:extLst>
           </a:blip>
@@ -4500,7 +4514,7 @@
           <p:nvPr/>
         </p:nvPicPr>
         <p:blipFill rotWithShape="1">
-          <a:blip r:embed="rId4">
+          <a:blip r:embed="rId3">
             <a:extLst>
               <a:ext uri="{28A0092B-C50C-407E-A947-70E740481C1C}">
                 <a14:useLocalDpi xmlns:a14="http://schemas.microsoft.com/office/drawing/2010/main" val="0"/>
@@ -4820,7 +4834,7 @@
           <p:nvPr/>
         </p:nvPicPr>
         <p:blipFill rotWithShape="1">
-          <a:blip r:embed="rId5">
+          <a:blip r:embed="rId4">
             <a:extLst>
               <a:ext uri="{28A0092B-C50C-407E-A947-70E740481C1C}">
                 <a14:useLocalDpi xmlns:a14="http://schemas.microsoft.com/office/drawing/2010/main" val="0"/>
@@ -5072,7 +5086,7 @@
           <p:nvPr/>
         </p:nvPicPr>
         <p:blipFill rotWithShape="1">
-          <a:blip r:embed="rId4">
+          <a:blip r:embed="rId3">
             <a:extLst>
               <a:ext uri="{28A0092B-C50C-407E-A947-70E740481C1C}">
                 <a14:useLocalDpi xmlns:a14="http://schemas.microsoft.com/office/drawing/2010/main" val="0"/>
@@ -5107,7 +5121,7 @@
           <p:nvPr/>
         </p:nvPicPr>
         <p:blipFill rotWithShape="1">
-          <a:blip r:embed="rId5">
+          <a:blip r:embed="rId4">
             <a:extLst>
               <a:ext uri="{28A0092B-C50C-407E-A947-70E740481C1C}">
                 <a14:useLocalDpi xmlns:a14="http://schemas.microsoft.com/office/drawing/2010/main" val="0"/>
@@ -5354,13 +5368,13 @@
           <p:nvPr/>
         </p:nvPicPr>
         <p:blipFill>
-          <a:blip r:embed="rId2">
+          <a:blip>
             <a:extLst>
               <a:ext uri="{28A0092B-C50C-407E-A947-70E740481C1C}">
                 <a14:useLocalDpi xmlns:a14="http://schemas.microsoft.com/office/drawing/2010/main" val="0"/>
               </a:ext>
               <a:ext uri="{96DAC541-7B7A-43D3-8B79-37D633B846F1}">
-                <asvg:svgBlip xmlns:asvg="http://schemas.microsoft.com/office/drawing/2016/SVG/main" r:embed="rId3"/>
+                <asvg:svgBlip xmlns:asvg="http://schemas.microsoft.com/office/drawing/2016/SVG/main" r:embed="rId2"/>
               </a:ext>
             </a:extLst>
           </a:blip>
@@ -5433,7 +5447,7 @@
           <p:nvPr/>
         </p:nvPicPr>
         <p:blipFill rotWithShape="1">
-          <a:blip r:embed="rId4">
+          <a:blip r:embed="rId3">
             <a:extLst>
               <a:ext uri="{28A0092B-C50C-407E-A947-70E740481C1C}">
                 <a14:useLocalDpi xmlns:a14="http://schemas.microsoft.com/office/drawing/2010/main" val="0"/>
@@ -5758,7 +5772,7 @@
           <p:nvPr/>
         </p:nvPicPr>
         <p:blipFill rotWithShape="1">
-          <a:blip r:embed="rId5">
+          <a:blip r:embed="rId4">
             <a:extLst>
               <a:ext uri="{28A0092B-C50C-407E-A947-70E740481C1C}">
                 <a14:useLocalDpi xmlns:a14="http://schemas.microsoft.com/office/drawing/2010/main" val="0"/>
@@ -6010,7 +6024,7 @@
           <p:nvPr/>
         </p:nvPicPr>
         <p:blipFill rotWithShape="1">
-          <a:blip r:embed="rId4">
+          <a:blip r:embed="rId3">
             <a:extLst>
               <a:ext uri="{28A0092B-C50C-407E-A947-70E740481C1C}">
                 <a14:useLocalDpi xmlns:a14="http://schemas.microsoft.com/office/drawing/2010/main" val="0"/>
@@ -6045,7 +6059,7 @@
           <p:nvPr/>
         </p:nvPicPr>
         <p:blipFill rotWithShape="1">
-          <a:blip r:embed="rId5">
+          <a:blip r:embed="rId4">
             <a:extLst>
               <a:ext uri="{28A0092B-C50C-407E-A947-70E740481C1C}">
                 <a14:useLocalDpi xmlns:a14="http://schemas.microsoft.com/office/drawing/2010/main" val="0"/>
@@ -6545,13 +6559,13 @@
           <p:nvPr/>
         </p:nvPicPr>
         <p:blipFill>
-          <a:blip r:embed="rId2">
+          <a:blip>
             <a:extLst>
               <a:ext uri="{28A0092B-C50C-407E-A947-70E740481C1C}">
                 <a14:useLocalDpi xmlns:a14="http://schemas.microsoft.com/office/drawing/2010/main" val="0"/>
               </a:ext>
               <a:ext uri="{96DAC541-7B7A-43D3-8B79-37D633B846F1}">
-                <asvg:svgBlip xmlns:asvg="http://schemas.microsoft.com/office/drawing/2016/SVG/main" r:embed="rId3"/>
+                <asvg:svgBlip xmlns:asvg="http://schemas.microsoft.com/office/drawing/2016/SVG/main" r:embed="rId2"/>
               </a:ext>
             </a:extLst>
           </a:blip>
@@ -6624,7 +6638,7 @@
           <p:nvPr/>
         </p:nvPicPr>
         <p:blipFill rotWithShape="1">
-          <a:blip r:embed="rId4">
+          <a:blip r:embed="rId3">
             <a:extLst>
               <a:ext uri="{28A0092B-C50C-407E-A947-70E740481C1C}">
                 <a14:useLocalDpi xmlns:a14="http://schemas.microsoft.com/office/drawing/2010/main" val="0"/>
@@ -6905,7 +6919,7 @@
           <p:nvPr/>
         </p:nvPicPr>
         <p:blipFill rotWithShape="1">
-          <a:blip r:embed="rId5">
+          <a:blip r:embed="rId4">
             <a:extLst>
               <a:ext uri="{28A0092B-C50C-407E-A947-70E740481C1C}">
                 <a14:useLocalDpi xmlns:a14="http://schemas.microsoft.com/office/drawing/2010/main" val="0"/>
@@ -7157,7 +7171,7 @@
           <p:nvPr/>
         </p:nvPicPr>
         <p:blipFill rotWithShape="1">
-          <a:blip r:embed="rId4">
+          <a:blip r:embed="rId3">
             <a:extLst>
               <a:ext uri="{28A0092B-C50C-407E-A947-70E740481C1C}">
                 <a14:useLocalDpi xmlns:a14="http://schemas.microsoft.com/office/drawing/2010/main" val="0"/>
@@ -7192,7 +7206,7 @@
           <p:nvPr/>
         </p:nvPicPr>
         <p:blipFill rotWithShape="1">
-          <a:blip r:embed="rId5">
+          <a:blip r:embed="rId4">
             <a:extLst>
               <a:ext uri="{28A0092B-C50C-407E-A947-70E740481C1C}">
                 <a14:useLocalDpi xmlns:a14="http://schemas.microsoft.com/office/drawing/2010/main" val="0"/>
@@ -8581,13 +8595,13 @@
           <p:nvPr/>
         </p:nvPicPr>
         <p:blipFill>
-          <a:blip r:embed="rId2">
+          <a:blip>
             <a:extLst>
               <a:ext uri="{28A0092B-C50C-407E-A947-70E740481C1C}">
                 <a14:useLocalDpi xmlns:a14="http://schemas.microsoft.com/office/drawing/2010/main" val="0"/>
               </a:ext>
               <a:ext uri="{96DAC541-7B7A-43D3-8B79-37D633B846F1}">
-                <asvg:svgBlip xmlns:asvg="http://schemas.microsoft.com/office/drawing/2016/SVG/main" r:embed="rId3"/>
+                <asvg:svgBlip xmlns:asvg="http://schemas.microsoft.com/office/drawing/2016/SVG/main" r:embed="rId2"/>
               </a:ext>
             </a:extLst>
           </a:blip>
@@ -8660,7 +8674,7 @@
           <p:nvPr/>
         </p:nvPicPr>
         <p:blipFill rotWithShape="1">
-          <a:blip r:embed="rId4">
+          <a:blip r:embed="rId3">
             <a:extLst>
               <a:ext uri="{28A0092B-C50C-407E-A947-70E740481C1C}">
                 <a14:useLocalDpi xmlns:a14="http://schemas.microsoft.com/office/drawing/2010/main" val="0"/>
@@ -8989,7 +9003,7 @@
           <p:nvPr/>
         </p:nvPicPr>
         <p:blipFill rotWithShape="1">
-          <a:blip r:embed="rId5">
+          <a:blip r:embed="rId4">
             <a:extLst>
               <a:ext uri="{28A0092B-C50C-407E-A947-70E740481C1C}">
                 <a14:useLocalDpi xmlns:a14="http://schemas.microsoft.com/office/drawing/2010/main" val="0"/>
@@ -9241,7 +9255,7 @@
           <p:nvPr/>
         </p:nvPicPr>
         <p:blipFill rotWithShape="1">
-          <a:blip r:embed="rId4">
+          <a:blip r:embed="rId3">
             <a:extLst>
               <a:ext uri="{28A0092B-C50C-407E-A947-70E740481C1C}">
                 <a14:useLocalDpi xmlns:a14="http://schemas.microsoft.com/office/drawing/2010/main" val="0"/>
@@ -9276,7 +9290,7 @@
           <p:nvPr/>
         </p:nvPicPr>
         <p:blipFill rotWithShape="1">
-          <a:blip r:embed="rId5">
+          <a:blip r:embed="rId4">
             <a:extLst>
               <a:ext uri="{28A0092B-C50C-407E-A947-70E740481C1C}">
                 <a14:useLocalDpi xmlns:a14="http://schemas.microsoft.com/office/drawing/2010/main" val="0"/>
@@ -10453,13 +10467,13 @@
           <p:nvPr/>
         </p:nvPicPr>
         <p:blipFill>
-          <a:blip r:embed="rId2">
+          <a:blip>
             <a:extLst>
               <a:ext uri="{28A0092B-C50C-407E-A947-70E740481C1C}">
                 <a14:useLocalDpi xmlns:a14="http://schemas.microsoft.com/office/drawing/2010/main" val="0"/>
               </a:ext>
               <a:ext uri="{96DAC541-7B7A-43D3-8B79-37D633B846F1}">
-                <asvg:svgBlip xmlns:asvg="http://schemas.microsoft.com/office/drawing/2016/SVG/main" r:embed="rId3"/>
+                <asvg:svgBlip xmlns:asvg="http://schemas.microsoft.com/office/drawing/2016/SVG/main" r:embed="rId2"/>
               </a:ext>
             </a:extLst>
           </a:blip>
@@ -10532,7 +10546,7 @@
           <p:nvPr/>
         </p:nvPicPr>
         <p:blipFill rotWithShape="1">
-          <a:blip r:embed="rId4">
+          <a:blip r:embed="rId3">
             <a:extLst>
               <a:ext uri="{28A0092B-C50C-407E-A947-70E740481C1C}">
                 <a14:useLocalDpi xmlns:a14="http://schemas.microsoft.com/office/drawing/2010/main" val="0"/>
@@ -10700,7 +10714,7 @@
           <p:nvPr/>
         </p:nvPicPr>
         <p:blipFill rotWithShape="1">
-          <a:blip r:embed="rId5">
+          <a:blip r:embed="rId4">
             <a:extLst>
               <a:ext uri="{28A0092B-C50C-407E-A947-70E740481C1C}">
                 <a14:useLocalDpi xmlns:a14="http://schemas.microsoft.com/office/drawing/2010/main" val="0"/>
@@ -10952,7 +10966,7 @@
           <p:nvPr/>
         </p:nvPicPr>
         <p:blipFill rotWithShape="1">
-          <a:blip r:embed="rId4">
+          <a:blip r:embed="rId3">
             <a:extLst>
               <a:ext uri="{28A0092B-C50C-407E-A947-70E740481C1C}">
                 <a14:useLocalDpi xmlns:a14="http://schemas.microsoft.com/office/drawing/2010/main" val="0"/>
@@ -10987,7 +11001,7 @@
           <p:nvPr/>
         </p:nvPicPr>
         <p:blipFill rotWithShape="1">
-          <a:blip r:embed="rId5">
+          <a:blip r:embed="rId4">
             <a:extLst>
               <a:ext uri="{28A0092B-C50C-407E-A947-70E740481C1C}">
                 <a14:useLocalDpi xmlns:a14="http://schemas.microsoft.com/office/drawing/2010/main" val="0"/>
@@ -13250,13 +13264,13 @@
           <p:nvPr/>
         </p:nvPicPr>
         <p:blipFill>
-          <a:blip r:embed="rId2">
+          <a:blip>
             <a:extLst>
               <a:ext uri="{28A0092B-C50C-407E-A947-70E740481C1C}">
                 <a14:useLocalDpi xmlns:a14="http://schemas.microsoft.com/office/drawing/2010/main" val="0"/>
               </a:ext>
               <a:ext uri="{96DAC541-7B7A-43D3-8B79-37D633B846F1}">
-                <asvg:svgBlip xmlns:asvg="http://schemas.microsoft.com/office/drawing/2016/SVG/main" r:embed="rId3"/>
+                <asvg:svgBlip xmlns:asvg="http://schemas.microsoft.com/office/drawing/2016/SVG/main" r:embed="rId2"/>
               </a:ext>
             </a:extLst>
           </a:blip>
@@ -13329,7 +13343,7 @@
           <p:nvPr/>
         </p:nvPicPr>
         <p:blipFill rotWithShape="1">
-          <a:blip r:embed="rId4">
+          <a:blip r:embed="rId3">
             <a:extLst>
               <a:ext uri="{28A0092B-C50C-407E-A947-70E740481C1C}">
                 <a14:useLocalDpi xmlns:a14="http://schemas.microsoft.com/office/drawing/2010/main" val="0"/>
@@ -13723,7 +13737,7 @@
           <p:nvPr/>
         </p:nvPicPr>
         <p:blipFill rotWithShape="1">
-          <a:blip r:embed="rId5">
+          <a:blip r:embed="rId4">
             <a:extLst>
               <a:ext uri="{28A0092B-C50C-407E-A947-70E740481C1C}">
                 <a14:useLocalDpi xmlns:a14="http://schemas.microsoft.com/office/drawing/2010/main" val="0"/>
@@ -13975,7 +13989,7 @@
           <p:nvPr/>
         </p:nvPicPr>
         <p:blipFill rotWithShape="1">
-          <a:blip r:embed="rId4">
+          <a:blip r:embed="rId3">
             <a:extLst>
               <a:ext uri="{28A0092B-C50C-407E-A947-70E740481C1C}">
                 <a14:useLocalDpi xmlns:a14="http://schemas.microsoft.com/office/drawing/2010/main" val="0"/>
@@ -14010,7 +14024,7 @@
           <p:nvPr/>
         </p:nvPicPr>
         <p:blipFill rotWithShape="1">
-          <a:blip r:embed="rId5">
+          <a:blip r:embed="rId4">
             <a:extLst>
               <a:ext uri="{28A0092B-C50C-407E-A947-70E740481C1C}">
                 <a14:useLocalDpi xmlns:a14="http://schemas.microsoft.com/office/drawing/2010/main" val="0"/>
@@ -14620,16 +14634,7 @@
                           </a:solidFill>
                           <a:latin typeface="Cambria Math" panose="02040503050406030204" pitchFamily="18" charset="0"/>
                         </a:rPr>
-                        <m:t>=0.7</m:t>
-                      </m:r>
-                      <m:r>
-                        <a:rPr lang="en-US" sz="2400" b="0" i="1" smtClean="0">
-                          <a:solidFill>
-                            <a:schemeClr val="bg1"/>
-                          </a:solidFill>
-                          <a:latin typeface="Cambria Math" panose="02040503050406030204" pitchFamily="18" charset="0"/>
-                        </a:rPr>
-                        <m:t>7</m:t>
+                        <m:t>=0.77</m:t>
                       </m:r>
                       <m:r>
                         <a:rPr lang="en-US" sz="2400" i="1">
@@ -14665,7 +14670,7 @@
                           </a:solidFill>
                           <a:latin typeface="Cambria Math" panose="02040503050406030204" pitchFamily="18" charset="0"/>
                         </a:rPr>
-                        <m:t>0.</m:t>
+                        <m:t>0.46</m:t>
                       </m:r>
                       <m:r>
                         <a:rPr lang="en-US" sz="2400" b="0" i="1" smtClean="0">
@@ -14674,7 +14679,16 @@
                           </a:solidFill>
                           <a:latin typeface="Cambria Math" panose="02040503050406030204" pitchFamily="18" charset="0"/>
                         </a:rPr>
-                        <m:t>46∗0.5</m:t>
+                        <m:t>×</m:t>
+                      </m:r>
+                      <m:r>
+                        <a:rPr lang="en-US" sz="2400" b="0" i="1" smtClean="0">
+                          <a:solidFill>
+                            <a:schemeClr val="bg1"/>
+                          </a:solidFill>
+                          <a:latin typeface="Cambria Math" panose="02040503050406030204" pitchFamily="18" charset="0"/>
+                        </a:rPr>
+                        <m:t>0.5</m:t>
                       </m:r>
                     </m:oMath>
                   </m:oMathPara>
@@ -14733,8 +14747,8 @@
           </p:sp>
         </mc:Fallback>
       </mc:AlternateContent>
-      <mc:AlternateContent xmlns:mc="http://schemas.openxmlformats.org/markup-compatibility/2006">
-        <mc:Choice xmlns:a14="http://schemas.microsoft.com/office/drawing/2010/main" Requires="a14">
+      <mc:AlternateContent xmlns:mc="http://schemas.openxmlformats.org/markup-compatibility/2006" xmlns:a14="http://schemas.microsoft.com/office/drawing/2010/main">
+        <mc:Choice Requires="a14">
           <p:sp>
             <p:nvSpPr>
               <p:cNvPr id="3" name="TextBox 2">
@@ -14791,7 +14805,7 @@
             </p:txBody>
           </p:sp>
         </mc:Choice>
-        <mc:Fallback>
+        <mc:Fallback xmlns="">
           <p:sp>
             <p:nvSpPr>
               <p:cNvPr id="3" name="TextBox 2">
@@ -14836,8 +14850,8 @@
           </p:sp>
         </mc:Fallback>
       </mc:AlternateContent>
-      <mc:AlternateContent xmlns:mc="http://schemas.openxmlformats.org/markup-compatibility/2006">
-        <mc:Choice xmlns:a14="http://schemas.microsoft.com/office/drawing/2010/main" Requires="a14">
+      <mc:AlternateContent xmlns:mc="http://schemas.openxmlformats.org/markup-compatibility/2006" xmlns:a14="http://schemas.microsoft.com/office/drawing/2010/main">
+        <mc:Choice Requires="a14">
           <p:sp>
             <p:nvSpPr>
               <p:cNvPr id="4" name="TextBox 3">
@@ -14984,16 +14998,7 @@
                           </a:solidFill>
                           <a:latin typeface="Cambria Math" panose="02040503050406030204" pitchFamily="18" charset="0"/>
                         </a:rPr>
-                        <m:t>=0.7</m:t>
-                      </m:r>
-                      <m:r>
-                        <a:rPr lang="en-US" sz="2400" b="0" i="1" smtClean="0">
-                          <a:solidFill>
-                            <a:schemeClr val="bg1"/>
-                          </a:solidFill>
-                          <a:latin typeface="Cambria Math" panose="02040503050406030204" pitchFamily="18" charset="0"/>
-                        </a:rPr>
-                        <m:t>7</m:t>
+                        <m:t>=0.77</m:t>
                       </m:r>
                       <m:r>
                         <a:rPr lang="en-US" sz="2400" i="1">
@@ -15043,7 +15048,7 @@
             </p:txBody>
           </p:sp>
         </mc:Choice>
-        <mc:Fallback>
+        <mc:Fallback xmlns="">
           <p:sp>
             <p:nvSpPr>
               <p:cNvPr id="4" name="TextBox 3">
@@ -15141,13 +15146,13 @@
           <p:nvPr/>
         </p:nvPicPr>
         <p:blipFill>
-          <a:blip r:embed="rId2">
+          <a:blip>
             <a:extLst>
               <a:ext uri="{28A0092B-C50C-407E-A947-70E740481C1C}">
                 <a14:useLocalDpi xmlns:a14="http://schemas.microsoft.com/office/drawing/2010/main" val="0"/>
               </a:ext>
               <a:ext uri="{96DAC541-7B7A-43D3-8B79-37D633B846F1}">
-                <asvg:svgBlip xmlns:asvg="http://schemas.microsoft.com/office/drawing/2016/SVG/main" r:embed="rId3"/>
+                <asvg:svgBlip xmlns:asvg="http://schemas.microsoft.com/office/drawing/2016/SVG/main" r:embed="rId2"/>
               </a:ext>
             </a:extLst>
           </a:blip>
@@ -15220,7 +15225,7 @@
           <p:nvPr/>
         </p:nvPicPr>
         <p:blipFill rotWithShape="1">
-          <a:blip r:embed="rId4">
+          <a:blip r:embed="rId3">
             <a:extLst>
               <a:ext uri="{28A0092B-C50C-407E-A947-70E740481C1C}">
                 <a14:useLocalDpi xmlns:a14="http://schemas.microsoft.com/office/drawing/2010/main" val="0"/>
@@ -15477,7 +15482,7 @@
           <p:nvPr/>
         </p:nvPicPr>
         <p:blipFill rotWithShape="1">
-          <a:blip r:embed="rId5">
+          <a:blip r:embed="rId4">
             <a:extLst>
               <a:ext uri="{28A0092B-C50C-407E-A947-70E740481C1C}">
                 <a14:useLocalDpi xmlns:a14="http://schemas.microsoft.com/office/drawing/2010/main" val="0"/>
@@ -15729,7 +15734,7 @@
           <p:nvPr/>
         </p:nvPicPr>
         <p:blipFill rotWithShape="1">
-          <a:blip r:embed="rId4">
+          <a:blip r:embed="rId3">
             <a:extLst>
               <a:ext uri="{28A0092B-C50C-407E-A947-70E740481C1C}">
                 <a14:useLocalDpi xmlns:a14="http://schemas.microsoft.com/office/drawing/2010/main" val="0"/>
@@ -15764,7 +15769,7 @@
           <p:nvPr/>
         </p:nvPicPr>
         <p:blipFill rotWithShape="1">
-          <a:blip r:embed="rId5">
+          <a:blip r:embed="rId4">
             <a:extLst>
               <a:ext uri="{28A0092B-C50C-407E-A947-70E740481C1C}">
                 <a14:useLocalDpi xmlns:a14="http://schemas.microsoft.com/office/drawing/2010/main" val="0"/>
